--- a/slidetroppotwin.pptx
+++ b/slidetroppotwin.pptx
@@ -3750,8 +3750,8 @@
         </p:blipFill>
         <p:spPr>
           <a:xfrm>
-            <a:off x="1066800" y="5427980"/>
-            <a:ext cx="10057765" cy="1862455"/>
+            <a:off x="1066800" y="5593080"/>
+            <a:ext cx="12805410" cy="1668145"/>
           </a:xfrm>
           <a:prstGeom prst="rect">
             <a:avLst/>
@@ -3814,8 +3814,8 @@
         </p:nvSpPr>
         <p:spPr>
           <a:xfrm>
-            <a:off x="2114550" y="121285"/>
-            <a:ext cx="8649335" cy="2122805"/>
+            <a:off x="1347470" y="111125"/>
+            <a:ext cx="9496425" cy="2122805"/>
           </a:xfrm>
           <a:prstGeom prst="rect">
             <a:avLst/>
@@ -3828,7 +3828,7 @@
           </a:bodyPr>
           <a:p>
             <a:r>
-              <a:rPr lang="en-US" altLang="en-US" sz="6600">
+              <a:rPr lang="" altLang="en-US" sz="6600">
                 <a:ln w="28575" cmpd="sng">
                   <a:solidFill>
                     <a:srgbClr val="47FF52"/>
@@ -3841,7 +3841,7 @@
                 <a:latin typeface="OPTINational-Gothic" charset="0"/>
                 <a:cs typeface="OPTINational-Gothic" charset="0"/>
               </a:rPr>
-              <a:t>ELABORATO TWIN PEAKS</a:t>
+              <a:t>DA CARTESIO A PHILIP GLASS</a:t>
             </a:r>
             <a:endParaRPr lang="en-US" altLang="en-US" sz="6600">
               <a:ln w="28575" cmpd="sng">

--- a/slidetroppotwin.pptx
+++ b/slidetroppotwin.pptx
@@ -617,6 +617,50 @@
     </a:lvl9pPr>
   </p:notesStyle>
 </p:notesMaster>
+</file>
+
+<file path=ppt/notesSlides/notesSlide1.xml><?xml version="1.0" encoding="utf-8"?>
+<p:notes xmlns:a="http://schemas.openxmlformats.org/drawingml/2006/main" xmlns:r="http://schemas.openxmlformats.org/officeDocument/2006/relationships" xmlns:p="http://schemas.openxmlformats.org/presentationml/2006/main">
+  <p:cSld>
+    <p:spTree>
+      <p:nvGrpSpPr>
+        <p:cNvPr id="1" name=""/>
+        <p:cNvGrpSpPr/>
+        <p:nvPr/>
+      </p:nvGrpSpPr>
+      <p:grpSpPr/>
+      <p:sp>
+        <p:nvSpPr>
+          <p:cNvPr id="2" name="Slide Image Placeholder 1"/>
+          <p:cNvSpPr/>
+          <p:nvPr>
+            <p:ph type="sldImg" idx="2"/>
+          </p:nvPr>
+        </p:nvSpPr>
+        <p:spPr/>
+      </p:sp>
+      <p:sp>
+        <p:nvSpPr>
+          <p:cNvPr id="3" name="Text Placeholder 2"/>
+          <p:cNvSpPr/>
+          <p:nvPr>
+            <p:ph type="body" idx="3"/>
+          </p:nvPr>
+        </p:nvSpPr>
+        <p:spPr/>
+        <p:txBody>
+          <a:bodyPr/>
+          <a:p>
+            <a:endParaRPr lang="en-US"/>
+          </a:p>
+        </p:txBody>
+      </p:sp>
+    </p:spTree>
+  </p:cSld>
+  <p:clrMapOvr>
+    <a:masterClrMapping/>
+  </p:clrMapOvr>
+</p:notes>
 </file>
 
 <file path=ppt/slideLayouts/slideLayout1.xml><?xml version="1.0" encoding="utf-8"?>
@@ -3750,8 +3794,8 @@
         </p:blipFill>
         <p:spPr>
           <a:xfrm>
-            <a:off x="1066800" y="5593080"/>
-            <a:ext cx="12805410" cy="1668145"/>
+            <a:off x="-260350" y="5608320"/>
+            <a:ext cx="12759055" cy="1661795"/>
           </a:xfrm>
           <a:prstGeom prst="rect">
             <a:avLst/>
@@ -3775,7 +3819,7 @@
         <p:spPr>
           <a:xfrm>
             <a:off x="9969500" y="14605"/>
-            <a:ext cx="2361565" cy="6871970"/>
+            <a:ext cx="2361565" cy="6834505"/>
           </a:xfrm>
           <a:prstGeom prst="rect">
             <a:avLst/>
@@ -3799,7 +3843,7 @@
         <p:spPr>
           <a:xfrm>
             <a:off x="-25400" y="13970"/>
-            <a:ext cx="2348230" cy="6844665"/>
+            <a:ext cx="2348230" cy="6835775"/>
           </a:xfrm>
           <a:prstGeom prst="rect">
             <a:avLst/>
@@ -3815,7 +3859,7 @@
         <p:spPr>
           <a:xfrm>
             <a:off x="1347470" y="111125"/>
-            <a:ext cx="9496425" cy="2122805"/>
+            <a:ext cx="9496425" cy="1106805"/>
           </a:xfrm>
           <a:prstGeom prst="rect">
             <a:avLst/>
@@ -3827,6 +3871,23 @@
             <a:spAutoFit/>
           </a:bodyPr>
           <a:p>
+            <a:pPr algn="ctr" fontAlgn="auto"/>
+            <a:r>
+              <a:rPr lang="en-US" altLang="en-US" sz="6600">
+                <a:ln w="28575" cmpd="sng">
+                  <a:solidFill>
+                    <a:srgbClr val="47FF52"/>
+                  </a:solidFill>
+                  <a:prstDash val="solid"/>
+                </a:ln>
+                <a:solidFill>
+                  <a:srgbClr val="644647"/>
+                </a:solidFill>
+                <a:latin typeface="OPTINational-Gothic" charset="0"/>
+                <a:cs typeface="OPTINational-Gothic" charset="0"/>
+              </a:rPr>
+              <a:t>DA CARTESIO A PHILIP GLAS</a:t>
+            </a:r>
             <a:r>
               <a:rPr lang="" altLang="en-US" sz="6600">
                 <a:ln w="28575" cmpd="sng">
@@ -3841,24 +3902,9 @@
                 <a:latin typeface="OPTINational-Gothic" charset="0"/>
                 <a:cs typeface="OPTINational-Gothic" charset="0"/>
               </a:rPr>
-              <a:t>DA CARTESIO A PHILIP GLASS</a:t>
-            </a:r>
-            <a:endParaRPr lang="en-US" altLang="en-US" sz="6600">
-              <a:ln w="28575" cmpd="sng">
-                <a:solidFill>
-                  <a:srgbClr val="47FF52"/>
-                </a:solidFill>
-                <a:prstDash val="solid"/>
-              </a:ln>
-              <a:solidFill>
-                <a:srgbClr val="644647"/>
-              </a:solidFill>
-              <a:latin typeface="OPTINational-Gothic" charset="0"/>
-              <a:cs typeface="OPTINational-Gothic" charset="0"/>
-            </a:endParaRPr>
-          </a:p>
-          <a:p>
-            <a:endParaRPr lang="en-US" altLang="en-US" sz="6600">
+              <a:t>S</a:t>
+            </a:r>
+            <a:endParaRPr lang="" altLang="en-US" sz="6600">
               <a:ln w="28575" cmpd="sng">
                 <a:solidFill>
                   <a:srgbClr val="47FF52"/>
@@ -3891,7 +3937,193 @@
         <p:spPr>
           <a:xfrm>
             <a:off x="298450" y="3103880"/>
-            <a:ext cx="1278255" cy="3745230"/>
+            <a:ext cx="1278255" cy="3744595"/>
+          </a:xfrm>
+          <a:prstGeom prst="rect">
+            <a:avLst/>
+          </a:prstGeom>
+        </p:spPr>
+      </p:pic>
+      <p:sp>
+        <p:nvSpPr>
+          <p:cNvPr id="4" name="Text Box 3"/>
+          <p:cNvSpPr txBox="true"/>
+          <p:nvPr/>
+        </p:nvSpPr>
+        <p:spPr>
+          <a:xfrm>
+            <a:off x="5071745" y="2366010"/>
+            <a:ext cx="2047240" cy="460375"/>
+          </a:xfrm>
+          <a:prstGeom prst="rect">
+            <a:avLst/>
+          </a:prstGeom>
+          <a:noFill/>
+        </p:spPr>
+        <p:txBody>
+          <a:bodyPr wrap="square" rtlCol="0">
+            <a:spAutoFit/>
+          </a:bodyPr>
+          <a:p>
+            <a:pPr algn="ctr" fontAlgn="auto"/>
+            <a:r>
+              <a:rPr lang="" altLang="en-US" sz="2400">
+                <a:ln w="12700" cmpd="sng">
+                  <a:solidFill>
+                    <a:srgbClr val="47FF52"/>
+                  </a:solidFill>
+                  <a:prstDash val="solid"/>
+                </a:ln>
+                <a:solidFill>
+                  <a:srgbClr val="644647"/>
+                </a:solidFill>
+                <a:latin typeface="OPTINational-Gothic" charset="0"/>
+                <a:cs typeface="OPTINational-Gothic" charset="0"/>
+              </a:rPr>
+              <a:t>Directed by</a:t>
+            </a:r>
+            <a:endParaRPr lang="" altLang="en-US" sz="2400">
+              <a:ln w="12700" cmpd="sng">
+                <a:solidFill>
+                  <a:srgbClr val="47FF52"/>
+                </a:solidFill>
+                <a:prstDash val="solid"/>
+              </a:ln>
+              <a:solidFill>
+                <a:srgbClr val="644647"/>
+              </a:solidFill>
+              <a:latin typeface="OPTINational-Gothic" charset="0"/>
+              <a:cs typeface="OPTINational-Gothic" charset="0"/>
+            </a:endParaRPr>
+          </a:p>
+        </p:txBody>
+      </p:sp>
+      <p:sp>
+        <p:nvSpPr>
+          <p:cNvPr id="9" name="Text Box 8"/>
+          <p:cNvSpPr txBox="true"/>
+          <p:nvPr/>
+        </p:nvSpPr>
+        <p:spPr>
+          <a:xfrm>
+            <a:off x="2404110" y="2826385"/>
+            <a:ext cx="7430135" cy="706755"/>
+          </a:xfrm>
+          <a:prstGeom prst="rect">
+            <a:avLst/>
+          </a:prstGeom>
+          <a:noFill/>
+        </p:spPr>
+        <p:txBody>
+          <a:bodyPr wrap="square" rtlCol="0">
+            <a:spAutoFit/>
+          </a:bodyPr>
+          <a:p>
+            <a:pPr algn="ctr" fontAlgn="auto"/>
+            <a:r>
+              <a:rPr lang="" altLang="en-US" sz="4000">
+                <a:ln w="28575" cmpd="sng">
+                  <a:solidFill>
+                    <a:srgbClr val="47FF52"/>
+                  </a:solidFill>
+                  <a:prstDash val="solid"/>
+                </a:ln>
+                <a:solidFill>
+                  <a:srgbClr val="644647"/>
+                </a:solidFill>
+                <a:latin typeface="OPTINational-Gothic" charset="0"/>
+                <a:cs typeface="OPTINational-Gothic" charset="0"/>
+              </a:rPr>
+              <a:t>SALVATORE PALUMBO</a:t>
+            </a:r>
+            <a:endParaRPr lang="" altLang="en-US" sz="4000">
+              <a:ln w="28575" cmpd="sng">
+                <a:solidFill>
+                  <a:srgbClr val="47FF52"/>
+                </a:solidFill>
+                <a:prstDash val="solid"/>
+              </a:ln>
+              <a:solidFill>
+                <a:srgbClr val="644647"/>
+              </a:solidFill>
+              <a:latin typeface="OPTINational-Gothic" charset="0"/>
+              <a:cs typeface="OPTINational-Gothic" charset="0"/>
+            </a:endParaRPr>
+          </a:p>
+        </p:txBody>
+      </p:sp>
+      <p:sp>
+        <p:nvSpPr>
+          <p:cNvPr id="10" name="Text Box 9"/>
+          <p:cNvSpPr txBox="true"/>
+          <p:nvPr/>
+        </p:nvSpPr>
+        <p:spPr>
+          <a:xfrm>
+            <a:off x="2463800" y="3973830"/>
+            <a:ext cx="7430135" cy="521970"/>
+          </a:xfrm>
+          <a:prstGeom prst="rect">
+            <a:avLst/>
+          </a:prstGeom>
+          <a:noFill/>
+        </p:spPr>
+        <p:txBody>
+          <a:bodyPr wrap="square" rtlCol="0">
+            <a:spAutoFit/>
+          </a:bodyPr>
+          <a:p>
+            <a:pPr algn="ctr" fontAlgn="auto"/>
+            <a:r>
+              <a:rPr lang="" altLang="en-US" sz="2800">
+                <a:ln w="19050" cmpd="sng">
+                  <a:solidFill>
+                    <a:srgbClr val="47FF52"/>
+                  </a:solidFill>
+                  <a:prstDash val="solid"/>
+                </a:ln>
+                <a:solidFill>
+                  <a:srgbClr val="644647"/>
+                </a:solidFill>
+                <a:latin typeface="OPTINational-Gothic" charset="0"/>
+                <a:cs typeface="OPTINational-Gothic" charset="0"/>
+              </a:rPr>
+              <a:t>Anno Scolastico 2020-2021</a:t>
+            </a:r>
+            <a:endParaRPr lang="" altLang="en-US" sz="2800">
+              <a:ln w="19050" cmpd="sng">
+                <a:solidFill>
+                  <a:srgbClr val="47FF52"/>
+                </a:solidFill>
+                <a:prstDash val="solid"/>
+              </a:ln>
+              <a:solidFill>
+                <a:srgbClr val="644647"/>
+              </a:solidFill>
+              <a:latin typeface="OPTINational-Gothic" charset="0"/>
+              <a:cs typeface="OPTINational-Gothic" charset="0"/>
+            </a:endParaRPr>
+          </a:p>
+        </p:txBody>
+      </p:sp>
+      <p:pic>
+        <p:nvPicPr>
+          <p:cNvPr id="12" name="Picture 11" descr="saturn"/>
+          <p:cNvPicPr>
+            <a:picLocks noChangeAspect="true"/>
+          </p:cNvPicPr>
+          <p:nvPr/>
+        </p:nvPicPr>
+        <p:blipFill>
+          <a:blip r:embed="rId5"/>
+          <a:stretch>
+            <a:fillRect/>
+          </a:stretch>
+        </p:blipFill>
+        <p:spPr>
+          <a:xfrm>
+            <a:off x="9610725" y="3750310"/>
+            <a:ext cx="3200400" cy="3200400"/>
           </a:xfrm>
           <a:prstGeom prst="rect">
             <a:avLst/>
